--- a/recipes/poster/poster-template-48x36.pptx
+++ b/recipes/poster/poster-template-48x36.pptx
@@ -3196,7 +3196,7 @@
                 </a:solidFill>
                 <a:latin typeface="Calibri"/>
               </a:rPr>
-              <a:t>[YOUR POSTER TITLE HERE]</a:t>
+              <a:t>[YOUR TITLE — under 15 words, state the biological result, not just the method]</a:t>
             </a:r>
           </a:p>
         </p:txBody>
@@ -4008,6 +4008,41 @@
         </p:nvSpPr>
         <p:spPr>
           <a:xfrm>
+            <a:off x="13350240" y="5166359"/>
+            <a:ext cx="1645920" cy="365760"/>
+          </a:xfrm>
+          <a:prstGeom prst="rect">
+            <a:avLst/>
+          </a:prstGeom>
+          <a:noFill/>
+        </p:spPr>
+        <p:txBody>
+          <a:bodyPr wrap="square" lIns="45720" rIns="45720">
+            <a:spAutoFit/>
+          </a:bodyPr>
+          <a:lstStyle/>
+          <a:p>
+            <a:pPr algn="l"/>
+            <a:r>
+              <a:rPr sz="1800" b="1" i="0">
+                <a:solidFill>
+                  <a:srgbClr val="003B5C"/>
+                </a:solidFill>
+                <a:latin typeface="Calibri"/>
+              </a:rPr>
+              <a:t>PANEL A</a:t>
+            </a:r>
+          </a:p>
+        </p:txBody>
+      </p:sp>
+      <p:sp>
+        <p:nvSpPr>
+          <p:cNvPr id="26" name="TextBox 25"/>
+          <p:cNvSpPr txBox="1"/>
+          <p:nvPr/>
+        </p:nvSpPr>
+        <p:spPr>
+          <a:xfrm>
             <a:off x="13258800" y="5074920"/>
             <a:ext cx="8229600" cy="7315200"/>
           </a:xfrm>
@@ -4037,7 +4072,7 @@
       </p:sp>
       <p:sp>
         <p:nvSpPr>
-          <p:cNvPr id="26" name="TextBox 25"/>
+          <p:cNvPr id="27" name="TextBox 26"/>
           <p:cNvSpPr txBox="1"/>
           <p:nvPr/>
         </p:nvSpPr>
@@ -4065,14 +4100,14 @@
                 </a:solidFill>
                 <a:latin typeface="Calibri"/>
               </a:rPr>
-              <a:t>Figure 1. [Caption describing the RGB color gamut convex hull]</a:t>
-            </a:r>
-          </a:p>
-        </p:txBody>
-      </p:sp>
-      <p:sp>
-        <p:nvSpPr>
-          <p:cNvPr id="27" name="Rectangle 26"/>
+              <a:t>Figure 1. [Describe what the gamut shows + state the gamut volume. Example: 'Color gamut of [Family] spanning X% of RGB space.']</a:t>
+            </a:r>
+          </a:p>
+        </p:txBody>
+      </p:sp>
+      <p:sp>
+        <p:nvSpPr>
+          <p:cNvPr id="28" name="Rectangle 27"/>
           <p:cNvSpPr/>
           <p:nvPr/>
         </p:nvSpPr>
@@ -4117,7 +4152,42 @@
       </p:sp>
       <p:sp>
         <p:nvSpPr>
-          <p:cNvPr id="28" name="TextBox 27"/>
+          <p:cNvPr id="29" name="TextBox 28"/>
+          <p:cNvSpPr txBox="1"/>
+          <p:nvPr/>
+        </p:nvSpPr>
+        <p:spPr>
+          <a:xfrm>
+            <a:off x="22494240" y="5166359"/>
+            <a:ext cx="1645920" cy="365760"/>
+          </a:xfrm>
+          <a:prstGeom prst="rect">
+            <a:avLst/>
+          </a:prstGeom>
+          <a:noFill/>
+        </p:spPr>
+        <p:txBody>
+          <a:bodyPr wrap="square" lIns="45720" rIns="45720">
+            <a:spAutoFit/>
+          </a:bodyPr>
+          <a:lstStyle/>
+          <a:p>
+            <a:pPr algn="l"/>
+            <a:r>
+              <a:rPr sz="1800" b="1" i="0">
+                <a:solidFill>
+                  <a:srgbClr val="003B5C"/>
+                </a:solidFill>
+                <a:latin typeface="Calibri"/>
+              </a:rPr>
+              <a:t>PANEL B</a:t>
+            </a:r>
+          </a:p>
+        </p:txBody>
+      </p:sp>
+      <p:sp>
+        <p:nvSpPr>
+          <p:cNvPr id="30" name="TextBox 29"/>
           <p:cNvSpPr txBox="1"/>
           <p:nvPr/>
         </p:nvSpPr>
@@ -4152,7 +4222,7 @@
       </p:sp>
       <p:sp>
         <p:nvSpPr>
-          <p:cNvPr id="29" name="TextBox 28"/>
+          <p:cNvPr id="31" name="TextBox 30"/>
           <p:cNvSpPr txBox="1"/>
           <p:nvPr/>
         </p:nvSpPr>
@@ -4180,14 +4250,14 @@
                 </a:solidFill>
                 <a:latin typeface="Calibri"/>
               </a:rPr>
-              <a:t>Figure 2. [Caption describing PC1 × PC2 phylomorphospace]</a:t>
-            </a:r>
-          </a:p>
-        </p:txBody>
-      </p:sp>
-      <p:sp>
-        <p:nvSpPr>
-          <p:cNvPr id="30" name="Rectangle 29"/>
+              <a:t>Figure 2. [Describe species positions in PC space + note any clustering. Example: 'Phylomorphospace showing convergence among genera X and Y.']</a:t>
+            </a:r>
+          </a:p>
+        </p:txBody>
+      </p:sp>
+      <p:sp>
+        <p:nvSpPr>
+          <p:cNvPr id="32" name="Rectangle 31"/>
           <p:cNvSpPr/>
           <p:nvPr/>
         </p:nvSpPr>
@@ -4232,7 +4302,42 @@
       </p:sp>
       <p:sp>
         <p:nvSpPr>
-          <p:cNvPr id="31" name="TextBox 30"/>
+          <p:cNvPr id="33" name="TextBox 32"/>
+          <p:cNvSpPr txBox="1"/>
+          <p:nvPr/>
+        </p:nvSpPr>
+        <p:spPr>
+          <a:xfrm>
+            <a:off x="13807440" y="13304520"/>
+            <a:ext cx="1645920" cy="365760"/>
+          </a:xfrm>
+          <a:prstGeom prst="rect">
+            <a:avLst/>
+          </a:prstGeom>
+          <a:noFill/>
+        </p:spPr>
+        <p:txBody>
+          <a:bodyPr wrap="square" lIns="45720" rIns="45720">
+            <a:spAutoFit/>
+          </a:bodyPr>
+          <a:lstStyle/>
+          <a:p>
+            <a:pPr algn="l"/>
+            <a:r>
+              <a:rPr sz="1800" b="1" i="0">
+                <a:solidFill>
+                  <a:srgbClr val="003B5C"/>
+                </a:solidFill>
+                <a:latin typeface="Calibri"/>
+              </a:rPr>
+              <a:t>PANEL C</a:t>
+            </a:r>
+          </a:p>
+        </p:txBody>
+      </p:sp>
+      <p:sp>
+        <p:nvSpPr>
+          <p:cNvPr id="34" name="TextBox 33"/>
           <p:cNvSpPr txBox="1"/>
           <p:nvPr/>
         </p:nvSpPr>
@@ -4267,7 +4372,7 @@
       </p:sp>
       <p:sp>
         <p:nvSpPr>
-          <p:cNvPr id="32" name="TextBox 31"/>
+          <p:cNvPr id="35" name="TextBox 34"/>
           <p:cNvSpPr txBox="1"/>
           <p:nvPr/>
         </p:nvSpPr>
@@ -4295,14 +4400,14 @@
                 </a:solidFill>
                 <a:latin typeface="Calibri"/>
               </a:rPr>
-              <a:t>Figure 3. [Caption describing ladderized phylogeny with PC-coded branches, tip images, and trait columns]</a:t>
-            </a:r>
-          </a:p>
-        </p:txBody>
-      </p:sp>
-      <p:sp>
-        <p:nvSpPr>
-          <p:cNvPr id="33" name="Rectangle 32"/>
+              <a:t>Figure 3. [Describe the ASR pattern + one key clade shift. Example: 'PC1 ancestral reconstruction reveals an early shift in Clade X.']</a:t>
+            </a:r>
+          </a:p>
+        </p:txBody>
+      </p:sp>
+      <p:sp>
+        <p:nvSpPr>
+          <p:cNvPr id="36" name="Rectangle 35"/>
           <p:cNvSpPr/>
           <p:nvPr/>
         </p:nvSpPr>
@@ -4347,7 +4452,42 @@
       </p:sp>
       <p:sp>
         <p:nvSpPr>
-          <p:cNvPr id="34" name="TextBox 33"/>
+          <p:cNvPr id="37" name="TextBox 36"/>
+          <p:cNvSpPr txBox="1"/>
+          <p:nvPr/>
+        </p:nvSpPr>
+        <p:spPr>
+          <a:xfrm>
+            <a:off x="32324040" y="4480559"/>
+            <a:ext cx="1645920" cy="365760"/>
+          </a:xfrm>
+          <a:prstGeom prst="rect">
+            <a:avLst/>
+          </a:prstGeom>
+          <a:noFill/>
+        </p:spPr>
+        <p:txBody>
+          <a:bodyPr wrap="square" lIns="45720" rIns="45720">
+            <a:spAutoFit/>
+          </a:bodyPr>
+          <a:lstStyle/>
+          <a:p>
+            <a:pPr algn="l"/>
+            <a:r>
+              <a:rPr sz="1800" b="1" i="0">
+                <a:solidFill>
+                  <a:srgbClr val="003B5C"/>
+                </a:solidFill>
+                <a:latin typeface="Calibri"/>
+              </a:rPr>
+              <a:t>PANEL D</a:t>
+            </a:r>
+          </a:p>
+        </p:txBody>
+      </p:sp>
+      <p:sp>
+        <p:nvSpPr>
+          <p:cNvPr id="38" name="TextBox 37"/>
           <p:cNvSpPr txBox="1"/>
           <p:nvPr/>
         </p:nvSpPr>
@@ -4382,7 +4522,7 @@
       </p:sp>
       <p:sp>
         <p:nvSpPr>
-          <p:cNvPr id="35" name="TextBox 34"/>
+          <p:cNvPr id="39" name="TextBox 38"/>
           <p:cNvSpPr txBox="1"/>
           <p:nvPr/>
         </p:nvSpPr>
@@ -4410,14 +4550,14 @@
                 </a:solidFill>
                 <a:latin typeface="Calibri"/>
               </a:rPr>
-              <a:t>Figure 4. [Caption describing PGLS partial-residual scatter plots]</a:t>
-            </a:r>
-          </a:p>
-        </p:txBody>
-      </p:sp>
-      <p:sp>
-        <p:nvSpPr>
-          <p:cNvPr id="36" name="TextBox 35"/>
+              <a:t>Figure 4. [State the PGLS result + p-value + direction. Example: 'Trophic level significantly predicts PC2 (p = 0.003, slope = -0.20).']</a:t>
+            </a:r>
+          </a:p>
+        </p:txBody>
+      </p:sp>
+      <p:sp>
+        <p:nvSpPr>
+          <p:cNvPr id="40" name="TextBox 39"/>
           <p:cNvSpPr txBox="1"/>
           <p:nvPr/>
         </p:nvSpPr>
@@ -4452,7 +4592,7 @@
       </p:sp>
       <p:sp>
         <p:nvSpPr>
-          <p:cNvPr id="37" name="Rectangle 36"/>
+          <p:cNvPr id="41" name="Rectangle 40"/>
           <p:cNvSpPr/>
           <p:nvPr/>
         </p:nvSpPr>
@@ -4495,7 +4635,7 @@
       </p:sp>
       <p:sp>
         <p:nvSpPr>
-          <p:cNvPr id="38" name="TextBox 37"/>
+          <p:cNvPr id="42" name="TextBox 41"/>
           <p:cNvSpPr txBox="1"/>
           <p:nvPr/>
         </p:nvSpPr>
@@ -4537,7 +4677,7 @@
       </p:sp>
       <p:sp>
         <p:nvSpPr>
-          <p:cNvPr id="39" name="TextBox 38"/>
+          <p:cNvPr id="43" name="TextBox 42"/>
           <p:cNvSpPr txBox="1"/>
           <p:nvPr/>
         </p:nvSpPr>
@@ -4572,7 +4712,7 @@
       </p:sp>
       <p:sp>
         <p:nvSpPr>
-          <p:cNvPr id="40" name="Rectangle 39"/>
+          <p:cNvPr id="44" name="Rectangle 43"/>
           <p:cNvSpPr/>
           <p:nvPr/>
         </p:nvSpPr>
@@ -4615,7 +4755,7 @@
       </p:sp>
       <p:sp>
         <p:nvSpPr>
-          <p:cNvPr id="41" name="TextBox 40"/>
+          <p:cNvPr id="45" name="TextBox 44"/>
           <p:cNvSpPr txBox="1"/>
           <p:nvPr/>
         </p:nvSpPr>
@@ -4660,7 +4800,7 @@
       </p:sp>
       <p:sp>
         <p:nvSpPr>
-          <p:cNvPr id="42" name="TextBox 41"/>
+          <p:cNvPr id="46" name="TextBox 45"/>
           <p:cNvSpPr txBox="1"/>
           <p:nvPr/>
         </p:nvSpPr>
@@ -4695,7 +4835,7 @@
       </p:sp>
       <p:sp>
         <p:nvSpPr>
-          <p:cNvPr id="43" name="Rectangle 42"/>
+          <p:cNvPr id="47" name="Rectangle 46"/>
           <p:cNvSpPr/>
           <p:nvPr/>
         </p:nvSpPr>
@@ -4738,7 +4878,7 @@
       </p:sp>
       <p:sp>
         <p:nvSpPr>
-          <p:cNvPr id="44" name="TextBox 43"/>
+          <p:cNvPr id="48" name="TextBox 47"/>
           <p:cNvSpPr txBox="1"/>
           <p:nvPr/>
         </p:nvSpPr>
@@ -4780,7 +4920,7 @@
       </p:sp>
       <p:sp>
         <p:nvSpPr>
-          <p:cNvPr id="45" name="TextBox 44"/>
+          <p:cNvPr id="49" name="TextBox 48"/>
           <p:cNvSpPr txBox="1"/>
           <p:nvPr/>
         </p:nvSpPr>
@@ -4815,7 +4955,7 @@
       </p:sp>
       <p:sp>
         <p:nvSpPr>
-          <p:cNvPr id="46" name="Rectangle 45"/>
+          <p:cNvPr id="50" name="Rectangle 49"/>
           <p:cNvSpPr/>
           <p:nvPr/>
         </p:nvSpPr>
@@ -4858,7 +4998,7 @@
       </p:sp>
       <p:sp>
         <p:nvSpPr>
-          <p:cNvPr id="47" name="TextBox 46"/>
+          <p:cNvPr id="51" name="TextBox 50"/>
           <p:cNvSpPr txBox="1"/>
           <p:nvPr/>
         </p:nvSpPr>
@@ -4900,7 +5040,42 @@
       </p:sp>
       <p:sp>
         <p:nvSpPr>
-          <p:cNvPr id="48" name="Rectangle 47"/>
+          <p:cNvPr id="52" name="TextBox 51"/>
+          <p:cNvSpPr txBox="1"/>
+          <p:nvPr/>
+        </p:nvSpPr>
+        <p:spPr>
+          <a:xfrm>
+            <a:off x="685800" y="31089600"/>
+            <a:ext cx="42519600" cy="365760"/>
+          </a:xfrm>
+          <a:prstGeom prst="rect">
+            <a:avLst/>
+          </a:prstGeom>
+          <a:noFill/>
+        </p:spPr>
+        <p:txBody>
+          <a:bodyPr wrap="square" lIns="45720" rIns="45720">
+            <a:spAutoFit/>
+          </a:bodyPr>
+          <a:lstStyle/>
+          <a:p>
+            <a:pPr algn="ctr"/>
+            <a:r>
+              <a:rPr sz="1600" b="1" i="1">
+                <a:solidFill>
+                  <a:srgbClr val="2774AE"/>
+                </a:solidFill>
+                <a:latin typeface="Calibri"/>
+              </a:rPr>
+              <a:t>REMINDER: Delete all [bracketed placeholder text] before printing. Save as PDF for the print shop.</a:t>
+            </a:r>
+          </a:p>
+        </p:txBody>
+      </p:sp>
+      <p:sp>
+        <p:nvSpPr>
+          <p:cNvPr id="53" name="Rectangle 52"/>
           <p:cNvSpPr/>
           <p:nvPr/>
         </p:nvSpPr>
@@ -4943,7 +5118,7 @@
       </p:sp>
       <p:sp>
         <p:nvSpPr>
-          <p:cNvPr id="49" name="TextBox 48"/>
+          <p:cNvPr id="54" name="TextBox 53"/>
           <p:cNvSpPr txBox="1"/>
           <p:nvPr/>
         </p:nvSpPr>
@@ -4978,7 +5153,7 @@
       </p:sp>
       <p:sp>
         <p:nvSpPr>
-          <p:cNvPr id="50" name="TextBox 49"/>
+          <p:cNvPr id="55" name="TextBox 54"/>
           <p:cNvSpPr txBox="1"/>
           <p:nvPr/>
         </p:nvSpPr>

--- a/recipes/poster/poster-template-48x36.pptx
+++ b/recipes/poster/poster-template-48x36.pptx
@@ -5181,7 +5181,7 @@
                 </a:solidFill>
                 <a:latin typeface="Calibri"/>
               </a:rPr>
-              <a:t>[We thank Dr. Michael Alfaro and the EEB 187 teaching team. Fish images sourced from FishView. Phylogeny from [source]. Supported by a TLC Seed Grant.]</a:t>
+              <a:t>[We thank Rosamari Hurtado for guidance during the project. Fish images sourced from FishBase, the Bishop Museum ichthyology collection (J.E. Randall photographs), and the FishView server. Phylogeny from [source]. Supported by a TLC Seed Grant to M. Alfaro.]</a:t>
             </a:r>
           </a:p>
         </p:txBody>

--- a/recipes/poster/poster-template-48x36.pptx
+++ b/recipes/poster/poster-template-48x36.pptx
@@ -5181,7 +5181,7 @@
                 </a:solidFill>
                 <a:latin typeface="Calibri"/>
               </a:rPr>
-              <a:t>[We thank Rosamari Hurtado for guidance during the project. Fish images sourced from FishBase, the Bishop Museum ichthyology collection (J.E. Randall photographs), and the FishView server. Phylogeny from [source]. Supported by a TLC Seed Grant to M. Alfaro.]</a:t>
+              <a:t>[We thank Rosamari Orduna for guidance during the project. Fish images sourced from FishBase, the Bishop Museum ichthyology collection (J.E. Randall photographs), and the FishView server. Phylogeny from [source]. Supported by a Seed Grant from the UCLA Teaching and Learning Center to M. Alfaro.]</a:t>
             </a:r>
           </a:p>
         </p:txBody>
